--- a/output_pptx/Angels_We_Have_Heard_On_High.pptx
+++ b/output_pptx/Angels_We_Have_Heard_On_High.pptx
@@ -3117,8 +3117,8 @@
         </p:nvSpPr>
         <p:spPr>
           <a:xfrm>
-            <a:off x="594360" y="2894076"/>
-            <a:ext cx="11002975" cy="685800"/>
+            <a:off x="640080" y="2702052"/>
+            <a:ext cx="10911535" cy="731520"/>
           </a:xfrm>
           <a:prstGeom prst="rect">
             <a:avLst/>
@@ -3133,48 +3133,13 @@
           <a:p>
             <a:pPr algn="ctr"/>
             <a:r>
-              <a:rPr sz="4400" b="1" i="0">
+              <a:rPr sz="4800" b="1" i="0">
                 <a:solidFill>
                   <a:srgbClr val="FFFFFF"/>
                 </a:solidFill>
                 <a:latin typeface="Arial"/>
               </a:rPr>
               <a:t>Anjos que Ouvimos nas Alturas</a:t>
-            </a:r>
-          </a:p>
-        </p:txBody>
-      </p:sp>
-      <p:sp>
-        <p:nvSpPr>
-          <p:cNvPr id="3" name="TextBox 2"/>
-          <p:cNvSpPr txBox="1"/>
-          <p:nvPr/>
-        </p:nvSpPr>
-        <p:spPr>
-          <a:xfrm>
-            <a:off x="594360" y="3616452"/>
-            <a:ext cx="11002975" cy="347472"/>
-          </a:xfrm>
-          <a:prstGeom prst="rect">
-            <a:avLst/>
-          </a:prstGeom>
-          <a:noFill/>
-        </p:spPr>
-        <p:txBody>
-          <a:bodyPr wrap="square">
-            <a:spAutoFit/>
-          </a:bodyPr>
-          <a:lstStyle/>
-          <a:p>
-            <a:pPr algn="ctr"/>
-            <a:r>
-              <a:rPr sz="2200" b="0" i="1">
-                <a:solidFill>
-                  <a:srgbClr val="8C8C8C"/>
-                </a:solidFill>
-                <a:latin typeface="Arial"/>
-              </a:rPr>
-              <a:t/>
             </a:r>
           </a:p>
         </p:txBody>
@@ -3213,8 +3178,8 @@
         </p:nvSpPr>
         <p:spPr>
           <a:xfrm>
-            <a:off x="594360" y="2258568"/>
-            <a:ext cx="11002975" cy="685800"/>
+            <a:off x="640080" y="2052828"/>
+            <a:ext cx="10911535" cy="731520"/>
           </a:xfrm>
           <a:prstGeom prst="rect">
             <a:avLst/>
@@ -3229,7 +3194,7 @@
           <a:p>
             <a:pPr algn="ctr"/>
             <a:r>
-              <a:rPr sz="4266" b="1" i="0">
+              <a:rPr sz="4600" b="1" i="0">
                 <a:solidFill>
                   <a:srgbClr val="FFFFFF"/>
                 </a:solidFill>
@@ -3248,8 +3213,8 @@
         </p:nvSpPr>
         <p:spPr>
           <a:xfrm>
-            <a:off x="594360" y="2980944"/>
-            <a:ext cx="11002975" cy="347472"/>
+            <a:off x="640080" y="2985516"/>
+            <a:ext cx="10911535" cy="731520"/>
           </a:xfrm>
           <a:prstGeom prst="rect">
             <a:avLst/>
@@ -3264,83 +3229,13 @@
           <a:p>
             <a:pPr algn="ctr"/>
             <a:r>
-              <a:rPr sz="2200" b="0" i="1">
-                <a:solidFill>
-                  <a:srgbClr val="8C8C8C"/>
-                </a:solidFill>
-                <a:latin typeface="Arial"/>
-              </a:rPr>
-              <a:t/>
-            </a:r>
-          </a:p>
-        </p:txBody>
-      </p:sp>
-      <p:sp>
-        <p:nvSpPr>
-          <p:cNvPr id="4" name="TextBox 3"/>
-          <p:cNvSpPr txBox="1"/>
-          <p:nvPr/>
-        </p:nvSpPr>
-        <p:spPr>
-          <a:xfrm>
-            <a:off x="594360" y="3529584"/>
-            <a:ext cx="11002975" cy="685800"/>
-          </a:xfrm>
-          <a:prstGeom prst="rect">
-            <a:avLst/>
-          </a:prstGeom>
-          <a:noFill/>
-        </p:spPr>
-        <p:txBody>
-          <a:bodyPr wrap="square">
-            <a:spAutoFit/>
-          </a:bodyPr>
-          <a:lstStyle/>
-          <a:p>
-            <a:pPr algn="ctr"/>
-            <a:r>
-              <a:rPr sz="4400" b="1" i="0">
+              <a:rPr sz="4800" b="1" i="0">
                 <a:solidFill>
                   <a:srgbClr val="FFFFFF"/>
                 </a:solidFill>
                 <a:latin typeface="Arial"/>
               </a:rPr>
               <a:t>Cristo, o Senhor, recém-nascido</a:t>
-            </a:r>
-          </a:p>
-        </p:txBody>
-      </p:sp>
-      <p:sp>
-        <p:nvSpPr>
-          <p:cNvPr id="5" name="TextBox 4"/>
-          <p:cNvSpPr txBox="1"/>
-          <p:nvPr/>
-        </p:nvSpPr>
-        <p:spPr>
-          <a:xfrm>
-            <a:off x="594360" y="4251960"/>
-            <a:ext cx="11002975" cy="347472"/>
-          </a:xfrm>
-          <a:prstGeom prst="rect">
-            <a:avLst/>
-          </a:prstGeom>
-          <a:noFill/>
-        </p:spPr>
-        <p:txBody>
-          <a:bodyPr wrap="square">
-            <a:spAutoFit/>
-          </a:bodyPr>
-          <a:lstStyle/>
-          <a:p>
-            <a:pPr algn="ctr"/>
-            <a:r>
-              <a:rPr sz="2200" b="0" i="1">
-                <a:solidFill>
-                  <a:srgbClr val="8C8C8C"/>
-                </a:solidFill>
-                <a:latin typeface="Arial"/>
-              </a:rPr>
-              <a:t/>
             </a:r>
           </a:p>
         </p:txBody>
@@ -3379,8 +3274,8 @@
         </p:nvSpPr>
         <p:spPr>
           <a:xfrm>
-            <a:off x="594360" y="2258568"/>
-            <a:ext cx="11002975" cy="685800"/>
+            <a:off x="640080" y="2052828"/>
+            <a:ext cx="10911535" cy="731520"/>
           </a:xfrm>
           <a:prstGeom prst="rect">
             <a:avLst/>
@@ -3395,7 +3290,7 @@
           <a:p>
             <a:pPr algn="ctr"/>
             <a:r>
-              <a:rPr sz="4400" b="1" i="0">
+              <a:rPr sz="4800" b="1" i="0">
                 <a:solidFill>
                   <a:srgbClr val="FFFFFF"/>
                 </a:solidFill>
@@ -3414,8 +3309,8 @@
         </p:nvSpPr>
         <p:spPr>
           <a:xfrm>
-            <a:off x="594360" y="2980944"/>
-            <a:ext cx="11002975" cy="347472"/>
+            <a:off x="640080" y="2985516"/>
+            <a:ext cx="10911535" cy="731520"/>
           </a:xfrm>
           <a:prstGeom prst="rect">
             <a:avLst/>
@@ -3430,83 +3325,13 @@
           <a:p>
             <a:pPr algn="ctr"/>
             <a:r>
-              <a:rPr sz="2200" b="0" i="1">
-                <a:solidFill>
-                  <a:srgbClr val="8C8C8C"/>
-                </a:solidFill>
-                <a:latin typeface="Arial"/>
-              </a:rPr>
-              <a:t/>
-            </a:r>
-          </a:p>
-        </p:txBody>
-      </p:sp>
-      <p:sp>
-        <p:nvSpPr>
-          <p:cNvPr id="4" name="TextBox 3"/>
-          <p:cNvSpPr txBox="1"/>
-          <p:nvPr/>
-        </p:nvSpPr>
-        <p:spPr>
-          <a:xfrm>
-            <a:off x="594360" y="3529584"/>
-            <a:ext cx="11002975" cy="685800"/>
-          </a:xfrm>
-          <a:prstGeom prst="rect">
-            <a:avLst/>
-          </a:prstGeom>
-          <a:noFill/>
-        </p:spPr>
-        <p:txBody>
-          <a:bodyPr wrap="square">
-            <a:spAutoFit/>
-          </a:bodyPr>
-          <a:lstStyle/>
-          <a:p>
-            <a:pPr algn="ctr"/>
-            <a:r>
-              <a:rPr sz="4400" b="1" i="0">
+              <a:rPr sz="4800" b="1" i="0">
                 <a:solidFill>
                   <a:srgbClr val="FFFFFF"/>
                 </a:solidFill>
                 <a:latin typeface="Arial"/>
               </a:rPr>
               <a:t>Glória in excelsis Deo</a:t>
-            </a:r>
-          </a:p>
-        </p:txBody>
-      </p:sp>
-      <p:sp>
-        <p:nvSpPr>
-          <p:cNvPr id="5" name="TextBox 4"/>
-          <p:cNvSpPr txBox="1"/>
-          <p:nvPr/>
-        </p:nvSpPr>
-        <p:spPr>
-          <a:xfrm>
-            <a:off x="594360" y="4251960"/>
-            <a:ext cx="11002975" cy="347472"/>
-          </a:xfrm>
-          <a:prstGeom prst="rect">
-            <a:avLst/>
-          </a:prstGeom>
-          <a:noFill/>
-        </p:spPr>
-        <p:txBody>
-          <a:bodyPr wrap="square">
-            <a:spAutoFit/>
-          </a:bodyPr>
-          <a:lstStyle/>
-          <a:p>
-            <a:pPr algn="ctr"/>
-            <a:r>
-              <a:rPr sz="2200" b="0" i="1">
-                <a:solidFill>
-                  <a:srgbClr val="8C8C8C"/>
-                </a:solidFill>
-                <a:latin typeface="Arial"/>
-              </a:rPr>
-              <a:t/>
             </a:r>
           </a:p>
         </p:txBody>
@@ -3545,8 +3370,8 @@
         </p:nvSpPr>
         <p:spPr>
           <a:xfrm>
-            <a:off x="594360" y="2258568"/>
-            <a:ext cx="11002975" cy="685800"/>
+            <a:off x="640080" y="2052828"/>
+            <a:ext cx="10911535" cy="731520"/>
           </a:xfrm>
           <a:prstGeom prst="rect">
             <a:avLst/>
@@ -3561,7 +3386,7 @@
           <a:p>
             <a:pPr algn="ctr"/>
             <a:r>
-              <a:rPr sz="4400" b="1" i="0">
+              <a:rPr sz="4800" b="1" i="0">
                 <a:solidFill>
                   <a:srgbClr val="FFFFFF"/>
                 </a:solidFill>
@@ -3580,8 +3405,8 @@
         </p:nvSpPr>
         <p:spPr>
           <a:xfrm>
-            <a:off x="594360" y="2980944"/>
-            <a:ext cx="11002975" cy="347472"/>
+            <a:off x="640080" y="2985516"/>
+            <a:ext cx="10911535" cy="731520"/>
           </a:xfrm>
           <a:prstGeom prst="rect">
             <a:avLst/>
@@ -3596,83 +3421,13 @@
           <a:p>
             <a:pPr algn="ctr"/>
             <a:r>
-              <a:rPr sz="2200" b="0" i="1">
-                <a:solidFill>
-                  <a:srgbClr val="8C8C8C"/>
-                </a:solidFill>
-                <a:latin typeface="Arial"/>
-              </a:rPr>
-              <a:t/>
-            </a:r>
-          </a:p>
-        </p:txBody>
-      </p:sp>
-      <p:sp>
-        <p:nvSpPr>
-          <p:cNvPr id="4" name="TextBox 3"/>
-          <p:cNvSpPr txBox="1"/>
-          <p:nvPr/>
-        </p:nvSpPr>
-        <p:spPr>
-          <a:xfrm>
-            <a:off x="594360" y="3529584"/>
-            <a:ext cx="11002975" cy="685800"/>
-          </a:xfrm>
-          <a:prstGeom prst="rect">
-            <a:avLst/>
-          </a:prstGeom>
-          <a:noFill/>
-        </p:spPr>
-        <p:txBody>
-          <a:bodyPr wrap="square">
-            <a:spAutoFit/>
-          </a:bodyPr>
-          <a:lstStyle/>
-          <a:p>
-            <a:pPr algn="ctr"/>
-            <a:r>
-              <a:rPr sz="4400" b="1" i="0">
+              <a:rPr sz="4800" b="1" i="0">
                 <a:solidFill>
                   <a:srgbClr val="FFFFFF"/>
                 </a:solidFill>
                 <a:latin typeface="Arial"/>
               </a:rPr>
               <a:t>Nosso Senhor Emmanuel</a:t>
-            </a:r>
-          </a:p>
-        </p:txBody>
-      </p:sp>
-      <p:sp>
-        <p:nvSpPr>
-          <p:cNvPr id="5" name="TextBox 4"/>
-          <p:cNvSpPr txBox="1"/>
-          <p:nvPr/>
-        </p:nvSpPr>
-        <p:spPr>
-          <a:xfrm>
-            <a:off x="594360" y="4251960"/>
-            <a:ext cx="11002975" cy="347472"/>
-          </a:xfrm>
-          <a:prstGeom prst="rect">
-            <a:avLst/>
-          </a:prstGeom>
-          <a:noFill/>
-        </p:spPr>
-        <p:txBody>
-          <a:bodyPr wrap="square">
-            <a:spAutoFit/>
-          </a:bodyPr>
-          <a:lstStyle/>
-          <a:p>
-            <a:pPr algn="ctr"/>
-            <a:r>
-              <a:rPr sz="2200" b="0" i="1">
-                <a:solidFill>
-                  <a:srgbClr val="8C8C8C"/>
-                </a:solidFill>
-                <a:latin typeface="Arial"/>
-              </a:rPr>
-              <a:t/>
             </a:r>
           </a:p>
         </p:txBody>
@@ -3711,8 +3466,8 @@
         </p:nvSpPr>
         <p:spPr>
           <a:xfrm>
-            <a:off x="594360" y="2258568"/>
-            <a:ext cx="11002975" cy="685800"/>
+            <a:off x="640080" y="2052828"/>
+            <a:ext cx="10911535" cy="731520"/>
           </a:xfrm>
           <a:prstGeom prst="rect">
             <a:avLst/>
@@ -3727,7 +3482,7 @@
           <a:p>
             <a:pPr algn="ctr"/>
             <a:r>
-              <a:rPr sz="4400" b="1" i="0">
+              <a:rPr sz="4800" b="1" i="0">
                 <a:solidFill>
                   <a:srgbClr val="FFFFFF"/>
                 </a:solidFill>
@@ -3746,8 +3501,8 @@
         </p:nvSpPr>
         <p:spPr>
           <a:xfrm>
-            <a:off x="594360" y="2980944"/>
-            <a:ext cx="11002975" cy="347472"/>
+            <a:off x="640080" y="2985516"/>
+            <a:ext cx="10911535" cy="731520"/>
           </a:xfrm>
           <a:prstGeom prst="rect">
             <a:avLst/>
@@ -3762,83 +3517,13 @@
           <a:p>
             <a:pPr algn="ctr"/>
             <a:r>
-              <a:rPr sz="2200" b="0" i="1">
-                <a:solidFill>
-                  <a:srgbClr val="8C8C8C"/>
-                </a:solidFill>
-                <a:latin typeface="Arial"/>
-              </a:rPr>
-              <a:t/>
-            </a:r>
-          </a:p>
-        </p:txBody>
-      </p:sp>
-      <p:sp>
-        <p:nvSpPr>
-          <p:cNvPr id="4" name="TextBox 3"/>
-          <p:cNvSpPr txBox="1"/>
-          <p:nvPr/>
-        </p:nvSpPr>
-        <p:spPr>
-          <a:xfrm>
-            <a:off x="594360" y="3529584"/>
-            <a:ext cx="11002975" cy="685800"/>
-          </a:xfrm>
-          <a:prstGeom prst="rect">
-            <a:avLst/>
-          </a:prstGeom>
-          <a:noFill/>
-        </p:spPr>
-        <p:txBody>
-          <a:bodyPr wrap="square">
-            <a:spAutoFit/>
-          </a:bodyPr>
-          <a:lstStyle/>
-          <a:p>
-            <a:pPr algn="ctr"/>
-            <a:r>
-              <a:rPr sz="4400" b="1" i="0">
+              <a:rPr sz="4800" b="1" i="0">
                 <a:solidFill>
                   <a:srgbClr val="FFFFFF"/>
                 </a:solidFill>
                 <a:latin typeface="Arial"/>
               </a:rPr>
               <a:t>Adoram o Santo Emmanuel</a:t>
-            </a:r>
-          </a:p>
-        </p:txBody>
-      </p:sp>
-      <p:sp>
-        <p:nvSpPr>
-          <p:cNvPr id="5" name="TextBox 4"/>
-          <p:cNvSpPr txBox="1"/>
-          <p:nvPr/>
-        </p:nvSpPr>
-        <p:spPr>
-          <a:xfrm>
-            <a:off x="594360" y="4251960"/>
-            <a:ext cx="11002975" cy="347472"/>
-          </a:xfrm>
-          <a:prstGeom prst="rect">
-            <a:avLst/>
-          </a:prstGeom>
-          <a:noFill/>
-        </p:spPr>
-        <p:txBody>
-          <a:bodyPr wrap="square">
-            <a:spAutoFit/>
-          </a:bodyPr>
-          <a:lstStyle/>
-          <a:p>
-            <a:pPr algn="ctr"/>
-            <a:r>
-              <a:rPr sz="2200" b="0" i="1">
-                <a:solidFill>
-                  <a:srgbClr val="8C8C8C"/>
-                </a:solidFill>
-                <a:latin typeface="Arial"/>
-              </a:rPr>
-              <a:t/>
             </a:r>
           </a:p>
         </p:txBody>
@@ -3877,8 +3562,8 @@
         </p:nvSpPr>
         <p:spPr>
           <a:xfrm>
-            <a:off x="594360" y="2258568"/>
-            <a:ext cx="11002975" cy="685800"/>
+            <a:off x="640080" y="2052828"/>
+            <a:ext cx="10911535" cy="731520"/>
           </a:xfrm>
           <a:prstGeom prst="rect">
             <a:avLst/>
@@ -3893,7 +3578,7 @@
           <a:p>
             <a:pPr algn="ctr"/>
             <a:r>
-              <a:rPr sz="4400" b="1" i="0">
+              <a:rPr sz="4800" b="1" i="0">
                 <a:solidFill>
                   <a:srgbClr val="FFFFFF"/>
                 </a:solidFill>
@@ -3912,8 +3597,8 @@
         </p:nvSpPr>
         <p:spPr>
           <a:xfrm>
-            <a:off x="594360" y="2980944"/>
-            <a:ext cx="11002975" cy="347472"/>
+            <a:off x="640080" y="2985516"/>
+            <a:ext cx="10911535" cy="731520"/>
           </a:xfrm>
           <a:prstGeom prst="rect">
             <a:avLst/>
@@ -3928,83 +3613,13 @@
           <a:p>
             <a:pPr algn="ctr"/>
             <a:r>
-              <a:rPr sz="2200" b="0" i="1">
-                <a:solidFill>
-                  <a:srgbClr val="8C8C8C"/>
-                </a:solidFill>
-                <a:latin typeface="Arial"/>
-              </a:rPr>
-              <a:t/>
-            </a:r>
-          </a:p>
-        </p:txBody>
-      </p:sp>
-      <p:sp>
-        <p:nvSpPr>
-          <p:cNvPr id="4" name="TextBox 3"/>
-          <p:cNvSpPr txBox="1"/>
-          <p:nvPr/>
-        </p:nvSpPr>
-        <p:spPr>
-          <a:xfrm>
-            <a:off x="594360" y="3529584"/>
-            <a:ext cx="11002975" cy="685800"/>
-          </a:xfrm>
-          <a:prstGeom prst="rect">
-            <a:avLst/>
-          </a:prstGeom>
-          <a:noFill/>
-        </p:spPr>
-        <p:txBody>
-          <a:bodyPr wrap="square">
-            <a:spAutoFit/>
-          </a:bodyPr>
-          <a:lstStyle/>
-          <a:p>
-            <a:pPr algn="ctr"/>
-            <a:r>
-              <a:rPr sz="4400" b="1" i="0">
+              <a:rPr sz="4800" b="1" i="0">
                 <a:solidFill>
                   <a:srgbClr val="FFFFFF"/>
                 </a:solidFill>
                 <a:latin typeface="Arial"/>
               </a:rPr>
               <a:t>Glória in excelsis Deo</a:t>
-            </a:r>
-          </a:p>
-        </p:txBody>
-      </p:sp>
-      <p:sp>
-        <p:nvSpPr>
-          <p:cNvPr id="5" name="TextBox 4"/>
-          <p:cNvSpPr txBox="1"/>
-          <p:nvPr/>
-        </p:nvSpPr>
-        <p:spPr>
-          <a:xfrm>
-            <a:off x="594360" y="4251960"/>
-            <a:ext cx="11002975" cy="347472"/>
-          </a:xfrm>
-          <a:prstGeom prst="rect">
-            <a:avLst/>
-          </a:prstGeom>
-          <a:noFill/>
-        </p:spPr>
-        <p:txBody>
-          <a:bodyPr wrap="square">
-            <a:spAutoFit/>
-          </a:bodyPr>
-          <a:lstStyle/>
-          <a:p>
-            <a:pPr algn="ctr"/>
-            <a:r>
-              <a:rPr sz="2200" b="0" i="1">
-                <a:solidFill>
-                  <a:srgbClr val="8C8C8C"/>
-                </a:solidFill>
-                <a:latin typeface="Arial"/>
-              </a:rPr>
-              <a:t/>
             </a:r>
           </a:p>
         </p:txBody>
@@ -4043,8 +3658,8 @@
         </p:nvSpPr>
         <p:spPr>
           <a:xfrm>
-            <a:off x="594360" y="2258568"/>
-            <a:ext cx="11002975" cy="685800"/>
+            <a:off x="640080" y="2052828"/>
+            <a:ext cx="10911535" cy="731520"/>
           </a:xfrm>
           <a:prstGeom prst="rect">
             <a:avLst/>
@@ -4059,7 +3674,7 @@
           <a:p>
             <a:pPr algn="ctr"/>
             <a:r>
-              <a:rPr sz="4400" b="1" i="0">
+              <a:rPr sz="4800" b="1" i="0">
                 <a:solidFill>
                   <a:srgbClr val="FFFFFF"/>
                 </a:solidFill>
@@ -4078,8 +3693,8 @@
         </p:nvSpPr>
         <p:spPr>
           <a:xfrm>
-            <a:off x="594360" y="2980944"/>
-            <a:ext cx="11002975" cy="347472"/>
+            <a:off x="640080" y="2985516"/>
+            <a:ext cx="10911535" cy="731520"/>
           </a:xfrm>
           <a:prstGeom prst="rect">
             <a:avLst/>
@@ -4094,83 +3709,13 @@
           <a:p>
             <a:pPr algn="ctr"/>
             <a:r>
-              <a:rPr sz="2200" b="0" i="1">
-                <a:solidFill>
-                  <a:srgbClr val="8C8C8C"/>
-                </a:solidFill>
-                <a:latin typeface="Arial"/>
-              </a:rPr>
-              <a:t/>
-            </a:r>
-          </a:p>
-        </p:txBody>
-      </p:sp>
-      <p:sp>
-        <p:nvSpPr>
-          <p:cNvPr id="4" name="TextBox 3"/>
-          <p:cNvSpPr txBox="1"/>
-          <p:nvPr/>
-        </p:nvSpPr>
-        <p:spPr>
-          <a:xfrm>
-            <a:off x="594360" y="3529584"/>
-            <a:ext cx="11002975" cy="685800"/>
-          </a:xfrm>
-          <a:prstGeom prst="rect">
-            <a:avLst/>
-          </a:prstGeom>
-          <a:noFill/>
-        </p:spPr>
-        <p:txBody>
-          <a:bodyPr wrap="square">
-            <a:spAutoFit/>
-          </a:bodyPr>
-          <a:lstStyle/>
-          <a:p>
-            <a:pPr algn="ctr"/>
-            <a:r>
-              <a:rPr sz="4400" b="1" i="0">
+              <a:rPr sz="4800" b="1" i="0">
                 <a:solidFill>
                   <a:srgbClr val="FFFFFF"/>
                 </a:solidFill>
                 <a:latin typeface="Arial"/>
               </a:rPr>
               <a:t>E os montes respondiam</a:t>
-            </a:r>
-          </a:p>
-        </p:txBody>
-      </p:sp>
-      <p:sp>
-        <p:nvSpPr>
-          <p:cNvPr id="5" name="TextBox 4"/>
-          <p:cNvSpPr txBox="1"/>
-          <p:nvPr/>
-        </p:nvSpPr>
-        <p:spPr>
-          <a:xfrm>
-            <a:off x="594360" y="4251960"/>
-            <a:ext cx="11002975" cy="347472"/>
-          </a:xfrm>
-          <a:prstGeom prst="rect">
-            <a:avLst/>
-          </a:prstGeom>
-          <a:noFill/>
-        </p:spPr>
-        <p:txBody>
-          <a:bodyPr wrap="square">
-            <a:spAutoFit/>
-          </a:bodyPr>
-          <a:lstStyle/>
-          <a:p>
-            <a:pPr algn="ctr"/>
-            <a:r>
-              <a:rPr sz="2200" b="0" i="1">
-                <a:solidFill>
-                  <a:srgbClr val="8C8C8C"/>
-                </a:solidFill>
-                <a:latin typeface="Arial"/>
-              </a:rPr>
-              <a:t/>
             </a:r>
           </a:p>
         </p:txBody>
@@ -4209,8 +3754,8 @@
         </p:nvSpPr>
         <p:spPr>
           <a:xfrm>
-            <a:off x="594360" y="2258568"/>
-            <a:ext cx="11002975" cy="685800"/>
+            <a:off x="640080" y="2052828"/>
+            <a:ext cx="10911535" cy="731520"/>
           </a:xfrm>
           <a:prstGeom prst="rect">
             <a:avLst/>
@@ -4225,7 +3770,7 @@
           <a:p>
             <a:pPr algn="ctr"/>
             <a:r>
-              <a:rPr sz="4400" b="1" i="0">
+              <a:rPr sz="4800" b="1" i="0">
                 <a:solidFill>
                   <a:srgbClr val="FFFFFF"/>
                 </a:solidFill>
@@ -4244,8 +3789,8 @@
         </p:nvSpPr>
         <p:spPr>
           <a:xfrm>
-            <a:off x="594360" y="2980944"/>
-            <a:ext cx="11002975" cy="347472"/>
+            <a:off x="640080" y="2985516"/>
+            <a:ext cx="10911535" cy="731520"/>
           </a:xfrm>
           <a:prstGeom prst="rect">
             <a:avLst/>
@@ -4260,83 +3805,13 @@
           <a:p>
             <a:pPr algn="ctr"/>
             <a:r>
-              <a:rPr sz="2200" b="0" i="1">
-                <a:solidFill>
-                  <a:srgbClr val="8C8C8C"/>
-                </a:solidFill>
-                <a:latin typeface="Arial"/>
-              </a:rPr>
-              <a:t/>
-            </a:r>
-          </a:p>
-        </p:txBody>
-      </p:sp>
-      <p:sp>
-        <p:nvSpPr>
-          <p:cNvPr id="4" name="TextBox 3"/>
-          <p:cNvSpPr txBox="1"/>
-          <p:nvPr/>
-        </p:nvSpPr>
-        <p:spPr>
-          <a:xfrm>
-            <a:off x="594360" y="3529584"/>
-            <a:ext cx="11002975" cy="685800"/>
-          </a:xfrm>
-          <a:prstGeom prst="rect">
-            <a:avLst/>
-          </a:prstGeom>
-          <a:noFill/>
-        </p:spPr>
-        <p:txBody>
-          <a:bodyPr wrap="square">
-            <a:spAutoFit/>
-          </a:bodyPr>
-          <a:lstStyle/>
-          <a:p>
-            <a:pPr algn="ctr"/>
-            <a:r>
-              <a:rPr sz="4400" b="1" i="0">
+              <a:rPr sz="4800" b="1" i="0">
                 <a:solidFill>
                   <a:srgbClr val="FFFFFF"/>
                 </a:solidFill>
                 <a:latin typeface="Arial"/>
               </a:rPr>
               <a:t>Glória in excelsis Deo</a:t>
-            </a:r>
-          </a:p>
-        </p:txBody>
-      </p:sp>
-      <p:sp>
-        <p:nvSpPr>
-          <p:cNvPr id="5" name="TextBox 4"/>
-          <p:cNvSpPr txBox="1"/>
-          <p:nvPr/>
-        </p:nvSpPr>
-        <p:spPr>
-          <a:xfrm>
-            <a:off x="594360" y="4251960"/>
-            <a:ext cx="11002975" cy="347472"/>
-          </a:xfrm>
-          <a:prstGeom prst="rect">
-            <a:avLst/>
-          </a:prstGeom>
-          <a:noFill/>
-        </p:spPr>
-        <p:txBody>
-          <a:bodyPr wrap="square">
-            <a:spAutoFit/>
-          </a:bodyPr>
-          <a:lstStyle/>
-          <a:p>
-            <a:pPr algn="ctr"/>
-            <a:r>
-              <a:rPr sz="2200" b="0" i="1">
-                <a:solidFill>
-                  <a:srgbClr val="8C8C8C"/>
-                </a:solidFill>
-                <a:latin typeface="Arial"/>
-              </a:rPr>
-              <a:t/>
             </a:r>
           </a:p>
         </p:txBody>
@@ -4375,8 +3850,8 @@
         </p:nvSpPr>
         <p:spPr>
           <a:xfrm>
-            <a:off x="594360" y="1837944"/>
-            <a:ext cx="11002975" cy="685800"/>
+            <a:off x="640080" y="1650492"/>
+            <a:ext cx="10911535" cy="731520"/>
           </a:xfrm>
           <a:prstGeom prst="rect">
             <a:avLst/>
@@ -4391,7 +3866,7 @@
           <a:p>
             <a:pPr algn="ctr"/>
             <a:r>
-              <a:rPr sz="4400" b="1" i="0">
+              <a:rPr sz="4800" b="1" i="0">
                 <a:solidFill>
                   <a:srgbClr val="FFFFFF"/>
                 </a:solidFill>
@@ -4410,8 +3885,8 @@
         </p:nvSpPr>
         <p:spPr>
           <a:xfrm>
-            <a:off x="594360" y="2560320"/>
-            <a:ext cx="11002975" cy="384048"/>
+            <a:off x="640080" y="2418588"/>
+            <a:ext cx="10911535" cy="365760"/>
           </a:xfrm>
           <a:prstGeom prst="rect">
             <a:avLst/>
@@ -4428,7 +3903,7 @@
             <a:r>
               <a:rPr sz="2400" b="0" i="1">
                 <a:solidFill>
-                  <a:srgbClr val="B4B4B4"/>
+                  <a:srgbClr val="AAAAAA"/>
                 </a:solidFill>
                 <a:latin typeface="Arial"/>
               </a:rPr>
@@ -4445,8 +3920,8 @@
         </p:nvSpPr>
         <p:spPr>
           <a:xfrm>
-            <a:off x="594360" y="2980944"/>
-            <a:ext cx="11002975" cy="347472"/>
+            <a:off x="640080" y="2985516"/>
+            <a:ext cx="10911535" cy="731520"/>
           </a:xfrm>
           <a:prstGeom prst="rect">
             <a:avLst/>
@@ -4461,13 +3936,13 @@
           <a:p>
             <a:pPr algn="ctr"/>
             <a:r>
-              <a:rPr sz="2000" b="0" i="1">
-                <a:solidFill>
-                  <a:srgbClr val="8C8C8C"/>
+              <a:rPr sz="4800" b="1" i="0">
+                <a:solidFill>
+                  <a:srgbClr val="FFFFFF"/>
                 </a:solidFill>
                 <a:latin typeface="Arial"/>
               </a:rPr>
-              <a:t>Glória in excelsis Deo</a:t>
+              <a:t>ゆうひはおちて</a:t>
             </a:r>
           </a:p>
         </p:txBody>
@@ -4480,8 +3955,8 @@
         </p:nvSpPr>
         <p:spPr>
           <a:xfrm>
-            <a:off x="594360" y="3529584"/>
-            <a:ext cx="11002975" cy="685800"/>
+            <a:off x="640080" y="3753612"/>
+            <a:ext cx="10911535" cy="365760"/>
           </a:xfrm>
           <a:prstGeom prst="rect">
             <a:avLst/>
@@ -4496,13 +3971,13 @@
           <a:p>
             <a:pPr algn="ctr"/>
             <a:r>
-              <a:rPr sz="4400" b="1" i="0">
-                <a:solidFill>
-                  <a:srgbClr val="FFFFFF"/>
+              <a:rPr sz="2400" b="0" i="1">
+                <a:solidFill>
+                  <a:srgbClr val="AAAAAA"/>
                 </a:solidFill>
                 <a:latin typeface="Arial"/>
               </a:rPr>
-              <a:t>ゆうひはおちて</a:t>
+              <a:t>yuu hi wa ochite</a:t>
             </a:r>
           </a:p>
         </p:txBody>
@@ -4515,8 +3990,8 @@
         </p:nvSpPr>
         <p:spPr>
           <a:xfrm>
-            <a:off x="594360" y="4251960"/>
-            <a:ext cx="11002975" cy="384048"/>
+            <a:off x="640080" y="4530852"/>
+            <a:ext cx="10911535" cy="310896"/>
           </a:xfrm>
           <a:prstGeom prst="rect">
             <a:avLst/>
@@ -4531,48 +4006,13 @@
           <a:p>
             <a:pPr algn="ctr"/>
             <a:r>
-              <a:rPr sz="2400" b="0" i="1">
-                <a:solidFill>
-                  <a:srgbClr val="B4B4B4"/>
+              <a:rPr sz="2000" b="0" i="1">
+                <a:solidFill>
+                  <a:srgbClr val="828282"/>
                 </a:solidFill>
                 <a:latin typeface="Arial"/>
               </a:rPr>
-              <a:t>yuu hi wa ochite</a:t>
-            </a:r>
-          </a:p>
-        </p:txBody>
-      </p:sp>
-      <p:sp>
-        <p:nvSpPr>
-          <p:cNvPr id="7" name="TextBox 6"/>
-          <p:cNvSpPr txBox="1"/>
-          <p:nvPr/>
-        </p:nvSpPr>
-        <p:spPr>
-          <a:xfrm>
-            <a:off x="594360" y="4672584"/>
-            <a:ext cx="11002975" cy="347472"/>
-          </a:xfrm>
-          <a:prstGeom prst="rect">
-            <a:avLst/>
-          </a:prstGeom>
-          <a:noFill/>
-        </p:spPr>
-        <p:txBody>
-          <a:bodyPr wrap="square">
-            <a:spAutoFit/>
-          </a:bodyPr>
-          <a:lstStyle/>
-          <a:p>
-            <a:pPr algn="ctr"/>
-            <a:r>
-              <a:rPr sz="2000" b="0" i="1">
-                <a:solidFill>
-                  <a:srgbClr val="8C8C8C"/>
-                </a:solidFill>
-                <a:latin typeface="Arial"/>
-              </a:rPr>
-              <a:t/>
+              <a:t>Glória in excelsis Deo</a:t>
             </a:r>
           </a:p>
         </p:txBody>
@@ -4611,8 +4051,8 @@
         </p:nvSpPr>
         <p:spPr>
           <a:xfrm>
-            <a:off x="594360" y="1837944"/>
-            <a:ext cx="11002975" cy="685800"/>
+            <a:off x="640080" y="1650492"/>
+            <a:ext cx="10911535" cy="731520"/>
           </a:xfrm>
           <a:prstGeom prst="rect">
             <a:avLst/>
@@ -4627,7 +4067,7 @@
           <a:p>
             <a:pPr algn="ctr"/>
             <a:r>
-              <a:rPr sz="4400" b="1" i="0">
+              <a:rPr sz="4800" b="1" i="0">
                 <a:solidFill>
                   <a:srgbClr val="FFFFFF"/>
                 </a:solidFill>
@@ -4646,8 +4086,8 @@
         </p:nvSpPr>
         <p:spPr>
           <a:xfrm>
-            <a:off x="594360" y="2560320"/>
-            <a:ext cx="11002975" cy="384048"/>
+            <a:off x="640080" y="2418588"/>
+            <a:ext cx="10911535" cy="365760"/>
           </a:xfrm>
           <a:prstGeom prst="rect">
             <a:avLst/>
@@ -4664,7 +4104,7 @@
             <a:r>
               <a:rPr sz="2400" b="0" i="1">
                 <a:solidFill>
-                  <a:srgbClr val="B4B4B4"/>
+                  <a:srgbClr val="AAAAAA"/>
                 </a:solidFill>
                 <a:latin typeface="Arial"/>
               </a:rPr>
@@ -4681,8 +4121,8 @@
         </p:nvSpPr>
         <p:spPr>
           <a:xfrm>
-            <a:off x="594360" y="2980944"/>
-            <a:ext cx="11002975" cy="347472"/>
+            <a:off x="640080" y="2985516"/>
+            <a:ext cx="10911535" cy="731520"/>
           </a:xfrm>
           <a:prstGeom prst="rect">
             <a:avLst/>
@@ -4697,13 +4137,13 @@
           <a:p>
             <a:pPr algn="ctr"/>
             <a:r>
-              <a:rPr sz="2000" b="0" i="1">
-                <a:solidFill>
-                  <a:srgbClr val="8C8C8C"/>
+              <a:rPr sz="4800" b="1" i="0">
+                <a:solidFill>
+                  <a:srgbClr val="FFFFFF"/>
                 </a:solidFill>
                 <a:latin typeface="Arial"/>
               </a:rPr>
-              <a:t/>
+              <a:t>あめよりひびく</a:t>
             </a:r>
           </a:p>
         </p:txBody>
@@ -4716,8 +4156,8 @@
         </p:nvSpPr>
         <p:spPr>
           <a:xfrm>
-            <a:off x="594360" y="3529584"/>
-            <a:ext cx="11002975" cy="685800"/>
+            <a:off x="640080" y="3753612"/>
+            <a:ext cx="10911535" cy="365760"/>
           </a:xfrm>
           <a:prstGeom prst="rect">
             <a:avLst/>
@@ -4732,83 +4172,13 @@
           <a:p>
             <a:pPr algn="ctr"/>
             <a:r>
-              <a:rPr sz="4400" b="1" i="0">
-                <a:solidFill>
-                  <a:srgbClr val="FFFFFF"/>
-                </a:solidFill>
-                <a:latin typeface="Arial"/>
-              </a:rPr>
-              <a:t>あめよりひびく</a:t>
-            </a:r>
-          </a:p>
-        </p:txBody>
-      </p:sp>
-      <p:sp>
-        <p:nvSpPr>
-          <p:cNvPr id="6" name="TextBox 5"/>
-          <p:cNvSpPr txBox="1"/>
-          <p:nvPr/>
-        </p:nvSpPr>
-        <p:spPr>
-          <a:xfrm>
-            <a:off x="594360" y="4251960"/>
-            <a:ext cx="11002975" cy="384048"/>
-          </a:xfrm>
-          <a:prstGeom prst="rect">
-            <a:avLst/>
-          </a:prstGeom>
-          <a:noFill/>
-        </p:spPr>
-        <p:txBody>
-          <a:bodyPr wrap="square">
-            <a:spAutoFit/>
-          </a:bodyPr>
-          <a:lstStyle/>
-          <a:p>
-            <a:pPr algn="ctr"/>
-            <a:r>
               <a:rPr sz="2400" b="0" i="1">
                 <a:solidFill>
-                  <a:srgbClr val="B4B4B4"/>
+                  <a:srgbClr val="AAAAAA"/>
                 </a:solidFill>
                 <a:latin typeface="Arial"/>
               </a:rPr>
               <a:t>ame yori hibiku</a:t>
-            </a:r>
-          </a:p>
-        </p:txBody>
-      </p:sp>
-      <p:sp>
-        <p:nvSpPr>
-          <p:cNvPr id="7" name="TextBox 6"/>
-          <p:cNvSpPr txBox="1"/>
-          <p:nvPr/>
-        </p:nvSpPr>
-        <p:spPr>
-          <a:xfrm>
-            <a:off x="594360" y="4672584"/>
-            <a:ext cx="11002975" cy="347472"/>
-          </a:xfrm>
-          <a:prstGeom prst="rect">
-            <a:avLst/>
-          </a:prstGeom>
-          <a:noFill/>
-        </p:spPr>
-        <p:txBody>
-          <a:bodyPr wrap="square">
-            <a:spAutoFit/>
-          </a:bodyPr>
-          <a:lstStyle/>
-          <a:p>
-            <a:pPr algn="ctr"/>
-            <a:r>
-              <a:rPr sz="2000" b="0" i="1">
-                <a:solidFill>
-                  <a:srgbClr val="8C8C8C"/>
-                </a:solidFill>
-                <a:latin typeface="Arial"/>
-              </a:rPr>
-              <a:t/>
             </a:r>
           </a:p>
         </p:txBody>
@@ -4847,8 +4217,8 @@
         </p:nvSpPr>
         <p:spPr>
           <a:xfrm>
-            <a:off x="594360" y="2258568"/>
-            <a:ext cx="11002975" cy="685800"/>
+            <a:off x="640080" y="2052828"/>
+            <a:ext cx="10911535" cy="731520"/>
           </a:xfrm>
           <a:prstGeom prst="rect">
             <a:avLst/>
@@ -4863,7 +4233,7 @@
           <a:p>
             <a:pPr algn="ctr"/>
             <a:r>
-              <a:rPr sz="4400" b="1" i="0">
+              <a:rPr sz="4800" b="1" i="0">
                 <a:solidFill>
                   <a:srgbClr val="FFFFFF"/>
                 </a:solidFill>
@@ -4882,8 +4252,8 @@
         </p:nvSpPr>
         <p:spPr>
           <a:xfrm>
-            <a:off x="594360" y="2980944"/>
-            <a:ext cx="11002975" cy="347472"/>
+            <a:off x="640080" y="2985516"/>
+            <a:ext cx="10911535" cy="731520"/>
           </a:xfrm>
           <a:prstGeom prst="rect">
             <a:avLst/>
@@ -4898,83 +4268,13 @@
           <a:p>
             <a:pPr algn="ctr"/>
             <a:r>
-              <a:rPr sz="2200" b="0" i="1">
-                <a:solidFill>
-                  <a:srgbClr val="8C8C8C"/>
-                </a:solidFill>
-                <a:latin typeface="Arial"/>
-              </a:rPr>
-              <a:t/>
-            </a:r>
-          </a:p>
-        </p:txBody>
-      </p:sp>
-      <p:sp>
-        <p:nvSpPr>
-          <p:cNvPr id="4" name="TextBox 3"/>
-          <p:cNvSpPr txBox="1"/>
-          <p:nvPr/>
-        </p:nvSpPr>
-        <p:spPr>
-          <a:xfrm>
-            <a:off x="594360" y="3529584"/>
-            <a:ext cx="11002975" cy="685800"/>
-          </a:xfrm>
-          <a:prstGeom prst="rect">
-            <a:avLst/>
-          </a:prstGeom>
-          <a:noFill/>
-        </p:spPr>
-        <p:txBody>
-          <a:bodyPr wrap="square">
-            <a:spAutoFit/>
-          </a:bodyPr>
-          <a:lstStyle/>
-          <a:p>
-            <a:pPr algn="ctr"/>
-            <a:r>
-              <a:rPr sz="4266" b="1" i="0">
+              <a:rPr sz="4600" b="1" i="0">
                 <a:solidFill>
                   <a:srgbClr val="FFFFFF"/>
                 </a:solidFill>
                 <a:latin typeface="Arial"/>
               </a:rPr>
               <a:t>Que prazer preenche o vosso canto</a:t>
-            </a:r>
-          </a:p>
-        </p:txBody>
-      </p:sp>
-      <p:sp>
-        <p:nvSpPr>
-          <p:cNvPr id="5" name="TextBox 4"/>
-          <p:cNvSpPr txBox="1"/>
-          <p:nvPr/>
-        </p:nvSpPr>
-        <p:spPr>
-          <a:xfrm>
-            <a:off x="594360" y="4251960"/>
-            <a:ext cx="11002975" cy="347472"/>
-          </a:xfrm>
-          <a:prstGeom prst="rect">
-            <a:avLst/>
-          </a:prstGeom>
-          <a:noFill/>
-        </p:spPr>
-        <p:txBody>
-          <a:bodyPr wrap="square">
-            <a:spAutoFit/>
-          </a:bodyPr>
-          <a:lstStyle/>
-          <a:p>
-            <a:pPr algn="ctr"/>
-            <a:r>
-              <a:rPr sz="2200" b="0" i="1">
-                <a:solidFill>
-                  <a:srgbClr val="8C8C8C"/>
-                </a:solidFill>
-                <a:latin typeface="Arial"/>
-              </a:rPr>
-              <a:t/>
             </a:r>
           </a:p>
         </p:txBody>
@@ -5013,8 +4313,8 @@
         </p:nvSpPr>
         <p:spPr>
           <a:xfrm>
-            <a:off x="594360" y="2258568"/>
-            <a:ext cx="11002975" cy="685800"/>
+            <a:off x="640080" y="2052828"/>
+            <a:ext cx="10911535" cy="731520"/>
           </a:xfrm>
           <a:prstGeom prst="rect">
             <a:avLst/>
@@ -5029,7 +4329,7 @@
           <a:p>
             <a:pPr algn="ctr"/>
             <a:r>
-              <a:rPr sz="4400" b="1" i="0">
+              <a:rPr sz="4800" b="1" i="0">
                 <a:solidFill>
                   <a:srgbClr val="FFFFFF"/>
                 </a:solidFill>
@@ -5048,8 +4348,8 @@
         </p:nvSpPr>
         <p:spPr>
           <a:xfrm>
-            <a:off x="594360" y="2980944"/>
-            <a:ext cx="11002975" cy="347472"/>
+            <a:off x="640080" y="2985516"/>
+            <a:ext cx="10911535" cy="731520"/>
           </a:xfrm>
           <a:prstGeom prst="rect">
             <a:avLst/>
@@ -5064,83 +4364,13 @@
           <a:p>
             <a:pPr algn="ctr"/>
             <a:r>
-              <a:rPr sz="2200" b="0" i="1">
-                <a:solidFill>
-                  <a:srgbClr val="8C8C8C"/>
-                </a:solidFill>
-                <a:latin typeface="Arial"/>
-              </a:rPr>
-              <a:t/>
-            </a:r>
-          </a:p>
-        </p:txBody>
-      </p:sp>
-      <p:sp>
-        <p:nvSpPr>
-          <p:cNvPr id="4" name="TextBox 3"/>
-          <p:cNvSpPr txBox="1"/>
-          <p:nvPr/>
-        </p:nvSpPr>
-        <p:spPr>
-          <a:xfrm>
-            <a:off x="594360" y="3529584"/>
-            <a:ext cx="11002975" cy="685800"/>
-          </a:xfrm>
-          <a:prstGeom prst="rect">
-            <a:avLst/>
-          </a:prstGeom>
-          <a:noFill/>
-        </p:spPr>
-        <p:txBody>
-          <a:bodyPr wrap="square">
-            <a:spAutoFit/>
-          </a:bodyPr>
-          <a:lstStyle/>
-          <a:p>
-            <a:pPr algn="ctr"/>
-            <a:r>
-              <a:rPr sz="4400" b="1" i="0">
+              <a:rPr sz="4800" b="1" i="0">
                 <a:solidFill>
                   <a:srgbClr val="FFFFFF"/>
                 </a:solidFill>
                 <a:latin typeface="Arial"/>
               </a:rPr>
               <a:t>Vos trouxe tanta alegria</a:t>
-            </a:r>
-          </a:p>
-        </p:txBody>
-      </p:sp>
-      <p:sp>
-        <p:nvSpPr>
-          <p:cNvPr id="5" name="TextBox 4"/>
-          <p:cNvSpPr txBox="1"/>
-          <p:nvPr/>
-        </p:nvSpPr>
-        <p:spPr>
-          <a:xfrm>
-            <a:off x="594360" y="4251960"/>
-            <a:ext cx="11002975" cy="347472"/>
-          </a:xfrm>
-          <a:prstGeom prst="rect">
-            <a:avLst/>
-          </a:prstGeom>
-          <a:noFill/>
-        </p:spPr>
-        <p:txBody>
-          <a:bodyPr wrap="square">
-            <a:spAutoFit/>
-          </a:bodyPr>
-          <a:lstStyle/>
-          <a:p>
-            <a:pPr algn="ctr"/>
-            <a:r>
-              <a:rPr sz="2200" b="0" i="1">
-                <a:solidFill>
-                  <a:srgbClr val="8C8C8C"/>
-                </a:solidFill>
-                <a:latin typeface="Arial"/>
-              </a:rPr>
-              <a:t/>
             </a:r>
           </a:p>
         </p:txBody>
@@ -5179,8 +4409,8 @@
         </p:nvSpPr>
         <p:spPr>
           <a:xfrm>
-            <a:off x="594360" y="2894076"/>
-            <a:ext cx="11002975" cy="685800"/>
+            <a:off x="640080" y="2702052"/>
+            <a:ext cx="10911535" cy="731520"/>
           </a:xfrm>
           <a:prstGeom prst="rect">
             <a:avLst/>
@@ -5195,48 +4425,13 @@
           <a:p>
             <a:pPr algn="ctr"/>
             <a:r>
-              <a:rPr sz="4400" b="1" i="0">
+              <a:rPr sz="4800" b="1" i="0">
                 <a:solidFill>
                   <a:srgbClr val="FFFFFF"/>
                 </a:solidFill>
                 <a:latin typeface="Arial"/>
               </a:rPr>
               <a:t>Glória in excelsis Deo</a:t>
-            </a:r>
-          </a:p>
-        </p:txBody>
-      </p:sp>
-      <p:sp>
-        <p:nvSpPr>
-          <p:cNvPr id="3" name="TextBox 2"/>
-          <p:cNvSpPr txBox="1"/>
-          <p:nvPr/>
-        </p:nvSpPr>
-        <p:spPr>
-          <a:xfrm>
-            <a:off x="594360" y="3616452"/>
-            <a:ext cx="11002975" cy="347472"/>
-          </a:xfrm>
-          <a:prstGeom prst="rect">
-            <a:avLst/>
-          </a:prstGeom>
-          <a:noFill/>
-        </p:spPr>
-        <p:txBody>
-          <a:bodyPr wrap="square">
-            <a:spAutoFit/>
-          </a:bodyPr>
-          <a:lstStyle/>
-          <a:p>
-            <a:pPr algn="ctr"/>
-            <a:r>
-              <a:rPr sz="2200" b="0" i="1">
-                <a:solidFill>
-                  <a:srgbClr val="8C8C8C"/>
-                </a:solidFill>
-                <a:latin typeface="Arial"/>
-              </a:rPr>
-              <a:t/>
             </a:r>
           </a:p>
         </p:txBody>
@@ -5275,8 +4470,8 @@
         </p:nvSpPr>
         <p:spPr>
           <a:xfrm>
-            <a:off x="594360" y="2258568"/>
-            <a:ext cx="11002975" cy="685800"/>
+            <a:off x="640080" y="2052828"/>
+            <a:ext cx="10911535" cy="731520"/>
           </a:xfrm>
           <a:prstGeom prst="rect">
             <a:avLst/>
@@ -5291,7 +4486,7 @@
           <a:p>
             <a:pPr algn="ctr"/>
             <a:r>
-              <a:rPr sz="4400" b="1" i="0">
+              <a:rPr sz="4800" b="1" i="0">
                 <a:solidFill>
                   <a:srgbClr val="FFFFFF"/>
                 </a:solidFill>
@@ -5310,8 +4505,8 @@
         </p:nvSpPr>
         <p:spPr>
           <a:xfrm>
-            <a:off x="594360" y="2980944"/>
-            <a:ext cx="11002975" cy="347472"/>
+            <a:off x="640080" y="2985516"/>
+            <a:ext cx="10911535" cy="731520"/>
           </a:xfrm>
           <a:prstGeom prst="rect">
             <a:avLst/>
@@ -5326,83 +4521,13 @@
           <a:p>
             <a:pPr algn="ctr"/>
             <a:r>
-              <a:rPr sz="2200" b="0" i="1">
-                <a:solidFill>
-                  <a:srgbClr val="8C8C8C"/>
-                </a:solidFill>
-                <a:latin typeface="Arial"/>
-              </a:rPr>
-              <a:t/>
-            </a:r>
-          </a:p>
-        </p:txBody>
-      </p:sp>
-      <p:sp>
-        <p:nvSpPr>
-          <p:cNvPr id="4" name="TextBox 3"/>
-          <p:cNvSpPr txBox="1"/>
-          <p:nvPr/>
-        </p:nvSpPr>
-        <p:spPr>
-          <a:xfrm>
-            <a:off x="594360" y="3529584"/>
-            <a:ext cx="11002975" cy="685800"/>
-          </a:xfrm>
-          <a:prstGeom prst="rect">
-            <a:avLst/>
-          </a:prstGeom>
-          <a:noFill/>
-        </p:spPr>
-        <p:txBody>
-          <a:bodyPr wrap="square">
-            <a:spAutoFit/>
-          </a:bodyPr>
-          <a:lstStyle/>
-          <a:p>
-            <a:pPr algn="ctr"/>
-            <a:r>
-              <a:rPr sz="4266" b="1" i="0">
+              <a:rPr sz="4600" b="1" i="0">
                 <a:solidFill>
                   <a:srgbClr val="FFFFFF"/>
                 </a:solidFill>
                 <a:latin typeface="Arial"/>
               </a:rPr>
               <a:t>A quem os anjos cantam nascimento</a:t>
-            </a:r>
-          </a:p>
-        </p:txBody>
-      </p:sp>
-      <p:sp>
-        <p:nvSpPr>
-          <p:cNvPr id="5" name="TextBox 4"/>
-          <p:cNvSpPr txBox="1"/>
-          <p:nvPr/>
-        </p:nvSpPr>
-        <p:spPr>
-          <a:xfrm>
-            <a:off x="594360" y="4251960"/>
-            <a:ext cx="11002975" cy="347472"/>
-          </a:xfrm>
-          <a:prstGeom prst="rect">
-            <a:avLst/>
-          </a:prstGeom>
-          <a:noFill/>
-        </p:spPr>
-        <p:txBody>
-          <a:bodyPr wrap="square">
-            <a:spAutoFit/>
-          </a:bodyPr>
-          <a:lstStyle/>
-          <a:p>
-            <a:pPr algn="ctr"/>
-            <a:r>
-              <a:rPr sz="2200" b="0" i="1">
-                <a:solidFill>
-                  <a:srgbClr val="8C8C8C"/>
-                </a:solidFill>
-                <a:latin typeface="Arial"/>
-              </a:rPr>
-              <a:t/>
             </a:r>
           </a:p>
         </p:txBody>

--- a/output_pptx/Angels_We_Have_Heard_On_High.pptx
+++ b/output_pptx/Angels_We_Have_Heard_On_High.pptx
@@ -3144,6 +3144,41 @@
           </a:p>
         </p:txBody>
       </p:sp>
+      <p:sp>
+        <p:nvSpPr>
+          <p:cNvPr id="3" name="TextBox 2"/>
+          <p:cNvSpPr txBox="1"/>
+          <p:nvPr/>
+        </p:nvSpPr>
+        <p:spPr>
+          <a:xfrm>
+            <a:off x="640080" y="3845052"/>
+            <a:ext cx="10911535" cy="310896"/>
+          </a:xfrm>
+          <a:prstGeom prst="rect">
+            <a:avLst/>
+          </a:prstGeom>
+          <a:noFill/>
+        </p:spPr>
+        <p:txBody>
+          <a:bodyPr wrap="square">
+            <a:spAutoFit/>
+          </a:bodyPr>
+          <a:lstStyle/>
+          <a:p>
+            <a:pPr algn="ctr"/>
+            <a:r>
+              <a:rPr sz="2000" b="0" i="0">
+                <a:solidFill>
+                  <a:srgbClr val="828282"/>
+                </a:solidFill>
+                <a:latin typeface="Arial"/>
+              </a:rPr>
+              <a:t>高き天より聞こゆる天使の歌</a:t>
+            </a:r>
+          </a:p>
+        </p:txBody>
+      </p:sp>
     </p:spTree>
   </p:cSld>
   <p:clrMapOvr>
@@ -3240,6 +3275,76 @@
           </a:p>
         </p:txBody>
       </p:sp>
+      <p:sp>
+        <p:nvSpPr>
+          <p:cNvPr id="4" name="TextBox 3"/>
+          <p:cNvSpPr txBox="1"/>
+          <p:nvPr/>
+        </p:nvSpPr>
+        <p:spPr>
+          <a:xfrm>
+            <a:off x="640080" y="4128516"/>
+            <a:ext cx="10911535" cy="310896"/>
+          </a:xfrm>
+          <a:prstGeom prst="rect">
+            <a:avLst/>
+          </a:prstGeom>
+          <a:noFill/>
+        </p:spPr>
+        <p:txBody>
+          <a:bodyPr wrap="square">
+            <a:spAutoFit/>
+          </a:bodyPr>
+          <a:lstStyle/>
+          <a:p>
+            <a:pPr algn="ctr"/>
+            <a:r>
+              <a:rPr sz="2000" b="0" i="0">
+                <a:solidFill>
+                  <a:srgbClr val="828282"/>
+                </a:solidFill>
+                <a:latin typeface="Arial"/>
+              </a:rPr>
+              <a:t>来たりて、ひざまずきて礼拝しなさい</a:t>
+            </a:r>
+          </a:p>
+        </p:txBody>
+      </p:sp>
+      <p:sp>
+        <p:nvSpPr>
+          <p:cNvPr id="5" name="TextBox 4"/>
+          <p:cNvSpPr txBox="1"/>
+          <p:nvPr/>
+        </p:nvSpPr>
+        <p:spPr>
+          <a:xfrm>
+            <a:off x="640080" y="4494276"/>
+            <a:ext cx="10911535" cy="310896"/>
+          </a:xfrm>
+          <a:prstGeom prst="rect">
+            <a:avLst/>
+          </a:prstGeom>
+          <a:noFill/>
+        </p:spPr>
+        <p:txBody>
+          <a:bodyPr wrap="square">
+            <a:spAutoFit/>
+          </a:bodyPr>
+          <a:lstStyle/>
+          <a:p>
+            <a:pPr algn="ctr"/>
+            <a:r>
+              <a:rPr sz="2000" b="0" i="0">
+                <a:solidFill>
+                  <a:srgbClr val="828282"/>
+                </a:solidFill>
+                <a:latin typeface="Arial"/>
+              </a:rPr>
+              <a:t>キリスト、主よ、新しく生まれた</a:t>
+            </a:r>
+          </a:p>
+        </p:txBody>
+      </p:sp>
     </p:spTree>
   </p:cSld>
   <p:clrMapOvr>
@@ -3336,6 +3441,76 @@
           </a:p>
         </p:txBody>
       </p:sp>
+      <p:sp>
+        <p:nvSpPr>
+          <p:cNvPr id="4" name="TextBox 3"/>
+          <p:cNvSpPr txBox="1"/>
+          <p:nvPr/>
+        </p:nvSpPr>
+        <p:spPr>
+          <a:xfrm>
+            <a:off x="640080" y="4128516"/>
+            <a:ext cx="10911535" cy="310896"/>
+          </a:xfrm>
+          <a:prstGeom prst="rect">
+            <a:avLst/>
+          </a:prstGeom>
+          <a:noFill/>
+        </p:spPr>
+        <p:txBody>
+          <a:bodyPr wrap="square">
+            <a:spAutoFit/>
+          </a:bodyPr>
+          <a:lstStyle/>
+          <a:p>
+            <a:pPr algn="ctr"/>
+            <a:r>
+              <a:rPr sz="2000" b="0" i="0">
+                <a:solidFill>
+                  <a:srgbClr val="828282"/>
+                </a:solidFill>
+                <a:latin typeface="Arial"/>
+              </a:rPr>
+              <a:t>栄光は至高き神にあり</a:t>
+            </a:r>
+          </a:p>
+        </p:txBody>
+      </p:sp>
+      <p:sp>
+        <p:nvSpPr>
+          <p:cNvPr id="5" name="TextBox 4"/>
+          <p:cNvSpPr txBox="1"/>
+          <p:nvPr/>
+        </p:nvSpPr>
+        <p:spPr>
+          <a:xfrm>
+            <a:off x="640080" y="4494276"/>
+            <a:ext cx="10911535" cy="310896"/>
+          </a:xfrm>
+          <a:prstGeom prst="rect">
+            <a:avLst/>
+          </a:prstGeom>
+          <a:noFill/>
+        </p:spPr>
+        <p:txBody>
+          <a:bodyPr wrap="square">
+            <a:spAutoFit/>
+          </a:bodyPr>
+          <a:lstStyle/>
+          <a:p>
+            <a:pPr algn="ctr"/>
+            <a:r>
+              <a:rPr sz="2000" b="0" i="0">
+                <a:solidFill>
+                  <a:srgbClr val="828282"/>
+                </a:solidFill>
+                <a:latin typeface="Arial"/>
+              </a:rPr>
+              <a:t>栄光は至高き神にあり</a:t>
+            </a:r>
+          </a:p>
+        </p:txBody>
+      </p:sp>
     </p:spTree>
   </p:cSld>
   <p:clrMapOvr>
@@ -3432,6 +3607,76 @@
           </a:p>
         </p:txBody>
       </p:sp>
+      <p:sp>
+        <p:nvSpPr>
+          <p:cNvPr id="4" name="TextBox 3"/>
+          <p:cNvSpPr txBox="1"/>
+          <p:nvPr/>
+        </p:nvSpPr>
+        <p:spPr>
+          <a:xfrm>
+            <a:off x="640080" y="4128516"/>
+            <a:ext cx="10911535" cy="310896"/>
+          </a:xfrm>
+          <a:prstGeom prst="rect">
+            <a:avLst/>
+          </a:prstGeom>
+          <a:noFill/>
+        </p:spPr>
+        <p:txBody>
+          <a:bodyPr wrap="square">
+            <a:spAutoFit/>
+          </a:bodyPr>
+          <a:lstStyle/>
+          <a:p>
+            <a:pPr algn="ctr"/>
+            <a:r>
+              <a:rPr sz="2000" b="0" i="0">
+                <a:solidFill>
+                  <a:srgbClr val="828282"/>
+                </a:solidFill>
+                <a:latin typeface="Arial"/>
+              </a:rPr>
+              <a:t>ご覧なさい、卑しい飼い葉桶に横たわる</a:t>
+            </a:r>
+          </a:p>
+        </p:txBody>
+      </p:sp>
+      <p:sp>
+        <p:nvSpPr>
+          <p:cNvPr id="5" name="TextBox 4"/>
+          <p:cNvSpPr txBox="1"/>
+          <p:nvPr/>
+        </p:nvSpPr>
+        <p:spPr>
+          <a:xfrm>
+            <a:off x="640080" y="4494276"/>
+            <a:ext cx="10911535" cy="310896"/>
+          </a:xfrm>
+          <a:prstGeom prst="rect">
+            <a:avLst/>
+          </a:prstGeom>
+          <a:noFill/>
+        </p:spPr>
+        <p:txBody>
+          <a:bodyPr wrap="square">
+            <a:spAutoFit/>
+          </a:bodyPr>
+          <a:lstStyle/>
+          <a:p>
+            <a:pPr algn="ctr"/>
+            <a:r>
+              <a:rPr sz="2000" b="0" i="0">
+                <a:solidFill>
+                  <a:srgbClr val="828282"/>
+                </a:solidFill>
+                <a:latin typeface="Arial"/>
+              </a:rPr>
+              <a:t>わが主エマヌエル</a:t>
+            </a:r>
+          </a:p>
+        </p:txBody>
+      </p:sp>
     </p:spTree>
   </p:cSld>
   <p:clrMapOvr>
@@ -3528,6 +3773,76 @@
           </a:p>
         </p:txBody>
       </p:sp>
+      <p:sp>
+        <p:nvSpPr>
+          <p:cNvPr id="4" name="TextBox 3"/>
+          <p:cNvSpPr txBox="1"/>
+          <p:nvPr/>
+        </p:nvSpPr>
+        <p:spPr>
+          <a:xfrm>
+            <a:off x="640080" y="4128516"/>
+            <a:ext cx="10911535" cy="310896"/>
+          </a:xfrm>
+          <a:prstGeom prst="rect">
+            <a:avLst/>
+          </a:prstGeom>
+          <a:noFill/>
+        </p:spPr>
+        <p:txBody>
+          <a:bodyPr wrap="square">
+            <a:spAutoFit/>
+          </a:bodyPr>
+          <a:lstStyle/>
+          <a:p>
+            <a:pPr algn="ctr"/>
+            <a:r>
+              <a:rPr sz="2000" b="0" i="0">
+                <a:solidFill>
+                  <a:srgbClr val="828282"/>
+                </a:solidFill>
+                <a:latin typeface="Arial"/>
+              </a:rPr>
+              <a:t>マリア、ヨセフと羊飼いたち</a:t>
+            </a:r>
+          </a:p>
+        </p:txBody>
+      </p:sp>
+      <p:sp>
+        <p:nvSpPr>
+          <p:cNvPr id="5" name="TextBox 4"/>
+          <p:cNvSpPr txBox="1"/>
+          <p:nvPr/>
+        </p:nvSpPr>
+        <p:spPr>
+          <a:xfrm>
+            <a:off x="640080" y="4494276"/>
+            <a:ext cx="10911535" cy="310896"/>
+          </a:xfrm>
+          <a:prstGeom prst="rect">
+            <a:avLst/>
+          </a:prstGeom>
+          <a:noFill/>
+        </p:spPr>
+        <p:txBody>
+          <a:bodyPr wrap="square">
+            <a:spAutoFit/>
+          </a:bodyPr>
+          <a:lstStyle/>
+          <a:p>
+            <a:pPr algn="ctr"/>
+            <a:r>
+              <a:rPr sz="2000" b="0" i="0">
+                <a:solidFill>
+                  <a:srgbClr val="828282"/>
+                </a:solidFill>
+                <a:latin typeface="Arial"/>
+              </a:rPr>
+              <a:t>聖なるエマヌエルを礼拝する</a:t>
+            </a:r>
+          </a:p>
+        </p:txBody>
+      </p:sp>
     </p:spTree>
   </p:cSld>
   <p:clrMapOvr>
@@ -3624,6 +3939,76 @@
           </a:p>
         </p:txBody>
       </p:sp>
+      <p:sp>
+        <p:nvSpPr>
+          <p:cNvPr id="4" name="TextBox 3"/>
+          <p:cNvSpPr txBox="1"/>
+          <p:nvPr/>
+        </p:nvSpPr>
+        <p:spPr>
+          <a:xfrm>
+            <a:off x="640080" y="4128516"/>
+            <a:ext cx="10911535" cy="310896"/>
+          </a:xfrm>
+          <a:prstGeom prst="rect">
+            <a:avLst/>
+          </a:prstGeom>
+          <a:noFill/>
+        </p:spPr>
+        <p:txBody>
+          <a:bodyPr wrap="square">
+            <a:spAutoFit/>
+          </a:bodyPr>
+          <a:lstStyle/>
+          <a:p>
+            <a:pPr algn="ctr"/>
+            <a:r>
+              <a:rPr sz="2000" b="0" i="0">
+                <a:solidFill>
+                  <a:srgbClr val="828282"/>
+                </a:solidFill>
+                <a:latin typeface="Arial"/>
+              </a:rPr>
+              <a:t>栄光は至高き神にあり</a:t>
+            </a:r>
+          </a:p>
+        </p:txBody>
+      </p:sp>
+      <p:sp>
+        <p:nvSpPr>
+          <p:cNvPr id="5" name="TextBox 4"/>
+          <p:cNvSpPr txBox="1"/>
+          <p:nvPr/>
+        </p:nvSpPr>
+        <p:spPr>
+          <a:xfrm>
+            <a:off x="640080" y="4494276"/>
+            <a:ext cx="10911535" cy="310896"/>
+          </a:xfrm>
+          <a:prstGeom prst="rect">
+            <a:avLst/>
+          </a:prstGeom>
+          <a:noFill/>
+        </p:spPr>
+        <p:txBody>
+          <a:bodyPr wrap="square">
+            <a:spAutoFit/>
+          </a:bodyPr>
+          <a:lstStyle/>
+          <a:p>
+            <a:pPr algn="ctr"/>
+            <a:r>
+              <a:rPr sz="2000" b="0" i="0">
+                <a:solidFill>
+                  <a:srgbClr val="828282"/>
+                </a:solidFill>
+                <a:latin typeface="Arial"/>
+              </a:rPr>
+              <a:t>栄光は至高き神にあり</a:t>
+            </a:r>
+          </a:p>
+        </p:txBody>
+      </p:sp>
     </p:spTree>
   </p:cSld>
   <p:clrMapOvr>
@@ -3720,6 +4105,76 @@
           </a:p>
         </p:txBody>
       </p:sp>
+      <p:sp>
+        <p:nvSpPr>
+          <p:cNvPr id="4" name="TextBox 3"/>
+          <p:cNvSpPr txBox="1"/>
+          <p:nvPr/>
+        </p:nvSpPr>
+        <p:spPr>
+          <a:xfrm>
+            <a:off x="640080" y="4128516"/>
+            <a:ext cx="10911535" cy="310896"/>
+          </a:xfrm>
+          <a:prstGeom prst="rect">
+            <a:avLst/>
+          </a:prstGeom>
+          <a:noFill/>
+        </p:spPr>
+        <p:txBody>
+          <a:bodyPr wrap="square">
+            <a:spAutoFit/>
+          </a:bodyPr>
+          <a:lstStyle/>
+          <a:p>
+            <a:pPr algn="ctr"/>
+            <a:r>
+              <a:rPr sz="2000" b="0" i="0">
+                <a:solidFill>
+                  <a:srgbClr val="828282"/>
+                </a:solidFill>
+                <a:latin typeface="Arial"/>
+              </a:rPr>
+              <a:t>高き天より聞こゆる天使たち</a:t>
+            </a:r>
+          </a:p>
+        </p:txBody>
+      </p:sp>
+      <p:sp>
+        <p:nvSpPr>
+          <p:cNvPr id="5" name="TextBox 4"/>
+          <p:cNvSpPr txBox="1"/>
+          <p:nvPr/>
+        </p:nvSpPr>
+        <p:spPr>
+          <a:xfrm>
+            <a:off x="640080" y="4494276"/>
+            <a:ext cx="10911535" cy="310896"/>
+          </a:xfrm>
+          <a:prstGeom prst="rect">
+            <a:avLst/>
+          </a:prstGeom>
+          <a:noFill/>
+        </p:spPr>
+        <p:txBody>
+          <a:bodyPr wrap="square">
+            <a:spAutoFit/>
+          </a:bodyPr>
+          <a:lstStyle/>
+          <a:p>
+            <a:pPr algn="ctr"/>
+            <a:r>
+              <a:rPr sz="2000" b="0" i="0">
+                <a:solidFill>
+                  <a:srgbClr val="828282"/>
+                </a:solidFill>
+                <a:latin typeface="Arial"/>
+              </a:rPr>
+              <a:t>そして山々は応えた</a:t>
+            </a:r>
+          </a:p>
+        </p:txBody>
+      </p:sp>
     </p:spTree>
   </p:cSld>
   <p:clrMapOvr>
@@ -3816,6 +4271,76 @@
           </a:p>
         </p:txBody>
       </p:sp>
+      <p:sp>
+        <p:nvSpPr>
+          <p:cNvPr id="4" name="TextBox 3"/>
+          <p:cNvSpPr txBox="1"/>
+          <p:nvPr/>
+        </p:nvSpPr>
+        <p:spPr>
+          <a:xfrm>
+            <a:off x="640080" y="4128516"/>
+            <a:ext cx="10911535" cy="310896"/>
+          </a:xfrm>
+          <a:prstGeom prst="rect">
+            <a:avLst/>
+          </a:prstGeom>
+          <a:noFill/>
+        </p:spPr>
+        <p:txBody>
+          <a:bodyPr wrap="square">
+            <a:spAutoFit/>
+          </a:bodyPr>
+          <a:lstStyle/>
+          <a:p>
+            <a:pPr algn="ctr"/>
+            <a:r>
+              <a:rPr sz="2000" b="0" i="0">
+                <a:solidFill>
+                  <a:srgbClr val="828282"/>
+                </a:solidFill>
+                <a:latin typeface="Arial"/>
+              </a:rPr>
+              <a:t>その調べをこだまさせて</a:t>
+            </a:r>
+          </a:p>
+        </p:txBody>
+      </p:sp>
+      <p:sp>
+        <p:nvSpPr>
+          <p:cNvPr id="5" name="TextBox 4"/>
+          <p:cNvSpPr txBox="1"/>
+          <p:nvPr/>
+        </p:nvSpPr>
+        <p:spPr>
+          <a:xfrm>
+            <a:off x="640080" y="4494276"/>
+            <a:ext cx="10911535" cy="310896"/>
+          </a:xfrm>
+          <a:prstGeom prst="rect">
+            <a:avLst/>
+          </a:prstGeom>
+          <a:noFill/>
+        </p:spPr>
+        <p:txBody>
+          <a:bodyPr wrap="square">
+            <a:spAutoFit/>
+          </a:bodyPr>
+          <a:lstStyle/>
+          <a:p>
+            <a:pPr algn="ctr"/>
+            <a:r>
+              <a:rPr sz="2000" b="0" i="0">
+                <a:solidFill>
+                  <a:srgbClr val="828282"/>
+                </a:solidFill>
+                <a:latin typeface="Arial"/>
+              </a:rPr>
+              <a:t>栄光は至高き神にあり</a:t>
+            </a:r>
+          </a:p>
+        </p:txBody>
+      </p:sp>
     </p:spTree>
   </p:cSld>
   <p:clrMapOvr>
@@ -4017,6 +4542,41 @@
           </a:p>
         </p:txBody>
       </p:sp>
+      <p:sp>
+        <p:nvSpPr>
+          <p:cNvPr id="7" name="TextBox 6"/>
+          <p:cNvSpPr txBox="1"/>
+          <p:nvPr/>
+        </p:nvSpPr>
+        <p:spPr>
+          <a:xfrm>
+            <a:off x="640080" y="4896612"/>
+            <a:ext cx="10911535" cy="310896"/>
+          </a:xfrm>
+          <a:prstGeom prst="rect">
+            <a:avLst/>
+          </a:prstGeom>
+          <a:noFill/>
+        </p:spPr>
+        <p:txBody>
+          <a:bodyPr wrap="square">
+            <a:spAutoFit/>
+          </a:bodyPr>
+          <a:lstStyle/>
+          <a:p>
+            <a:pPr algn="ctr"/>
+            <a:r>
+              <a:rPr sz="2000" b="0" i="1">
+                <a:solidFill>
+                  <a:srgbClr val="828282"/>
+                </a:solidFill>
+                <a:latin typeface="Arial"/>
+              </a:rPr>
+              <a:t>O sol se põe</a:t>
+            </a:r>
+          </a:p>
+        </p:txBody>
+      </p:sp>
     </p:spTree>
   </p:cSld>
   <p:clrMapOvr>
@@ -4183,6 +4743,76 @@
           </a:p>
         </p:txBody>
       </p:sp>
+      <p:sp>
+        <p:nvSpPr>
+          <p:cNvPr id="6" name="TextBox 5"/>
+          <p:cNvSpPr txBox="1"/>
+          <p:nvPr/>
+        </p:nvSpPr>
+        <p:spPr>
+          <a:xfrm>
+            <a:off x="640080" y="4530852"/>
+            <a:ext cx="10911535" cy="310896"/>
+          </a:xfrm>
+          <a:prstGeom prst="rect">
+            <a:avLst/>
+          </a:prstGeom>
+          <a:noFill/>
+        </p:spPr>
+        <p:txBody>
+          <a:bodyPr wrap="square">
+            <a:spAutoFit/>
+          </a:bodyPr>
+          <a:lstStyle/>
+          <a:p>
+            <a:pPr algn="ctr"/>
+            <a:r>
+              <a:rPr sz="2000" b="0" i="1">
+                <a:solidFill>
+                  <a:srgbClr val="828282"/>
+                </a:solidFill>
+                <a:latin typeface="Arial"/>
+              </a:rPr>
+              <a:t>Melodia doce e eterna</a:t>
+            </a:r>
+          </a:p>
+        </p:txBody>
+      </p:sp>
+      <p:sp>
+        <p:nvSpPr>
+          <p:cNvPr id="7" name="TextBox 6"/>
+          <p:cNvSpPr txBox="1"/>
+          <p:nvPr/>
+        </p:nvSpPr>
+        <p:spPr>
+          <a:xfrm>
+            <a:off x="640080" y="4896612"/>
+            <a:ext cx="10911535" cy="310896"/>
+          </a:xfrm>
+          <a:prstGeom prst="rect">
+            <a:avLst/>
+          </a:prstGeom>
+          <a:noFill/>
+        </p:spPr>
+        <p:txBody>
+          <a:bodyPr wrap="square">
+            <a:spAutoFit/>
+          </a:bodyPr>
+          <a:lstStyle/>
+          <a:p>
+            <a:pPr algn="ctr"/>
+            <a:r>
+              <a:rPr sz="2000" b="0" i="1">
+                <a:solidFill>
+                  <a:srgbClr val="828282"/>
+                </a:solidFill>
+                <a:latin typeface="Arial"/>
+              </a:rPr>
+              <a:t>Ecoando do céu</a:t>
+            </a:r>
+          </a:p>
+        </p:txBody>
+      </p:sp>
     </p:spTree>
   </p:cSld>
   <p:clrMapOvr>
@@ -4279,6 +4909,76 @@
           </a:p>
         </p:txBody>
       </p:sp>
+      <p:sp>
+        <p:nvSpPr>
+          <p:cNvPr id="4" name="TextBox 3"/>
+          <p:cNvSpPr txBox="1"/>
+          <p:nvPr/>
+        </p:nvSpPr>
+        <p:spPr>
+          <a:xfrm>
+            <a:off x="640080" y="4128516"/>
+            <a:ext cx="10911535" cy="310896"/>
+          </a:xfrm>
+          <a:prstGeom prst="rect">
+            <a:avLst/>
+          </a:prstGeom>
+          <a:noFill/>
+        </p:spPr>
+        <p:txBody>
+          <a:bodyPr wrap="square">
+            <a:spAutoFit/>
+          </a:bodyPr>
+          <a:lstStyle/>
+          <a:p>
+            <a:pPr algn="ctr"/>
+            <a:r>
+              <a:rPr sz="2000" b="0" i="0">
+                <a:solidFill>
+                  <a:srgbClr val="828282"/>
+                </a:solidFill>
+                <a:latin typeface="Arial"/>
+              </a:rPr>
+              <a:t>羊飼いたちよ、なぜこの喜び</a:t>
+            </a:r>
+          </a:p>
+        </p:txBody>
+      </p:sp>
+      <p:sp>
+        <p:nvSpPr>
+          <p:cNvPr id="5" name="TextBox 4"/>
+          <p:cNvSpPr txBox="1"/>
+          <p:nvPr/>
+        </p:nvSpPr>
+        <p:spPr>
+          <a:xfrm>
+            <a:off x="640080" y="4494276"/>
+            <a:ext cx="10911535" cy="310896"/>
+          </a:xfrm>
+          <a:prstGeom prst="rect">
+            <a:avLst/>
+          </a:prstGeom>
+          <a:noFill/>
+        </p:spPr>
+        <p:txBody>
+          <a:bodyPr wrap="square">
+            <a:spAutoFit/>
+          </a:bodyPr>
+          <a:lstStyle/>
+          <a:p>
+            <a:pPr algn="ctr"/>
+            <a:r>
+              <a:rPr sz="2000" b="0" i="0">
+                <a:solidFill>
+                  <a:srgbClr val="828282"/>
+                </a:solidFill>
+                <a:latin typeface="Arial"/>
+              </a:rPr>
+              <a:t>何という喜びがお前たちの歌を満たすのか</a:t>
+            </a:r>
+          </a:p>
+        </p:txBody>
+      </p:sp>
     </p:spTree>
   </p:cSld>
   <p:clrMapOvr>
@@ -4375,6 +5075,76 @@
           </a:p>
         </p:txBody>
       </p:sp>
+      <p:sp>
+        <p:nvSpPr>
+          <p:cNvPr id="4" name="TextBox 3"/>
+          <p:cNvSpPr txBox="1"/>
+          <p:nvPr/>
+        </p:nvSpPr>
+        <p:spPr>
+          <a:xfrm>
+            <a:off x="640080" y="4128516"/>
+            <a:ext cx="10911535" cy="310896"/>
+          </a:xfrm>
+          <a:prstGeom prst="rect">
+            <a:avLst/>
+          </a:prstGeom>
+          <a:noFill/>
+        </p:spPr>
+        <p:txBody>
+          <a:bodyPr wrap="square">
+            <a:spAutoFit/>
+          </a:bodyPr>
+          <a:lstStyle/>
+          <a:p>
+            <a:pPr algn="ctr"/>
+            <a:r>
+              <a:rPr sz="2000" b="0" i="0">
+                <a:solidFill>
+                  <a:srgbClr val="828282"/>
+                </a:solidFill>
+                <a:latin typeface="Arial"/>
+              </a:rPr>
+              <a:t>天から来た何という新しさ</a:t>
+            </a:r>
+          </a:p>
+        </p:txBody>
+      </p:sp>
+      <p:sp>
+        <p:nvSpPr>
+          <p:cNvPr id="5" name="TextBox 4"/>
+          <p:cNvSpPr txBox="1"/>
+          <p:nvPr/>
+        </p:nvSpPr>
+        <p:spPr>
+          <a:xfrm>
+            <a:off x="640080" y="4494276"/>
+            <a:ext cx="10911535" cy="310896"/>
+          </a:xfrm>
+          <a:prstGeom prst="rect">
+            <a:avLst/>
+          </a:prstGeom>
+          <a:noFill/>
+        </p:spPr>
+        <p:txBody>
+          <a:bodyPr wrap="square">
+            <a:spAutoFit/>
+          </a:bodyPr>
+          <a:lstStyle/>
+          <a:p>
+            <a:pPr algn="ctr"/>
+            <a:r>
+              <a:rPr sz="2000" b="0" i="0">
+                <a:solidFill>
+                  <a:srgbClr val="828282"/>
+                </a:solidFill>
+                <a:latin typeface="Arial"/>
+              </a:rPr>
+              <a:t>お前たちにこれほどの喜びをもたらした</a:t>
+            </a:r>
+          </a:p>
+        </p:txBody>
+      </p:sp>
     </p:spTree>
   </p:cSld>
   <p:clrMapOvr>
@@ -4436,6 +5206,41 @@
           </a:p>
         </p:txBody>
       </p:sp>
+      <p:sp>
+        <p:nvSpPr>
+          <p:cNvPr id="3" name="TextBox 2"/>
+          <p:cNvSpPr txBox="1"/>
+          <p:nvPr/>
+        </p:nvSpPr>
+        <p:spPr>
+          <a:xfrm>
+            <a:off x="640080" y="3845052"/>
+            <a:ext cx="10911535" cy="310896"/>
+          </a:xfrm>
+          <a:prstGeom prst="rect">
+            <a:avLst/>
+          </a:prstGeom>
+          <a:noFill/>
+        </p:spPr>
+        <p:txBody>
+          <a:bodyPr wrap="square">
+            <a:spAutoFit/>
+          </a:bodyPr>
+          <a:lstStyle/>
+          <a:p>
+            <a:pPr algn="ctr"/>
+            <a:r>
+              <a:rPr sz="2000" b="0" i="0">
+                <a:solidFill>
+                  <a:srgbClr val="828282"/>
+                </a:solidFill>
+                <a:latin typeface="Arial"/>
+              </a:rPr>
+              <a:t>栄光は至高き神にあり</a:t>
+            </a:r>
+          </a:p>
+        </p:txBody>
+      </p:sp>
     </p:spTree>
   </p:cSld>
   <p:clrMapOvr>
@@ -4528,6 +5333,76 @@
                 <a:latin typeface="Arial"/>
               </a:rPr>
               <a:t>A quem os anjos cantam nascimento</a:t>
+            </a:r>
+          </a:p>
+        </p:txBody>
+      </p:sp>
+      <p:sp>
+        <p:nvSpPr>
+          <p:cNvPr id="4" name="TextBox 3"/>
+          <p:cNvSpPr txBox="1"/>
+          <p:nvPr/>
+        </p:nvSpPr>
+        <p:spPr>
+          <a:xfrm>
+            <a:off x="640080" y="4128516"/>
+            <a:ext cx="10911535" cy="310896"/>
+          </a:xfrm>
+          <a:prstGeom prst="rect">
+            <a:avLst/>
+          </a:prstGeom>
+          <a:noFill/>
+        </p:spPr>
+        <p:txBody>
+          <a:bodyPr wrap="square">
+            <a:spAutoFit/>
+          </a:bodyPr>
+          <a:lstStyle/>
+          <a:p>
+            <a:pPr algn="ctr"/>
+            <a:r>
+              <a:rPr sz="2000" b="0" i="0">
+                <a:solidFill>
+                  <a:srgbClr val="828282"/>
+                </a:solidFill>
+                <a:latin typeface="Arial"/>
+              </a:rPr>
+              <a:t>ベツレヘムに来て、あの方をご覧なさい</a:t>
+            </a:r>
+          </a:p>
+        </p:txBody>
+      </p:sp>
+      <p:sp>
+        <p:nvSpPr>
+          <p:cNvPr id="5" name="TextBox 4"/>
+          <p:cNvSpPr txBox="1"/>
+          <p:nvPr/>
+        </p:nvSpPr>
+        <p:spPr>
+          <a:xfrm>
+            <a:off x="640080" y="4494276"/>
+            <a:ext cx="10911535" cy="310896"/>
+          </a:xfrm>
+          <a:prstGeom prst="rect">
+            <a:avLst/>
+          </a:prstGeom>
+          <a:noFill/>
+        </p:spPr>
+        <p:txBody>
+          <a:bodyPr wrap="square">
+            <a:spAutoFit/>
+          </a:bodyPr>
+          <a:lstStyle/>
+          <a:p>
+            <a:pPr algn="ctr"/>
+            <a:r>
+              <a:rPr sz="2000" b="0" i="0">
+                <a:solidFill>
+                  <a:srgbClr val="828282"/>
+                </a:solidFill>
+                <a:latin typeface="Arial"/>
+              </a:rPr>
+              <a:t>天使たちが誕生を歌う方に</a:t>
             </a:r>
           </a:p>
         </p:txBody>
